--- a/1-Interventionsforschung/1-Abbildungen/ivf-1-additiv-subtraktives-design-modell-3.pptx
+++ b/1-Interventionsforschung/1-Abbildungen/ivf-1-additiv-subtraktives-design-modell-3.pptx
@@ -243,7 +243,7 @@
           <a:p>
             <a:fld id="{88C639A2-0E94-4BC3-BD1A-EF9BF8A564DE}" type="datetimeFigureOut">
               <a:rPr lang="de-DE" smtClean="0"/>
-              <a:t>02.04.2026</a:t>
+              <a:t>19.04.2026</a:t>
             </a:fld>
             <a:endParaRPr lang="de-DE"/>
           </a:p>
@@ -413,7 +413,7 @@
           <a:p>
             <a:fld id="{88C639A2-0E94-4BC3-BD1A-EF9BF8A564DE}" type="datetimeFigureOut">
               <a:rPr lang="de-DE" smtClean="0"/>
-              <a:t>02.04.2026</a:t>
+              <a:t>19.04.2026</a:t>
             </a:fld>
             <a:endParaRPr lang="de-DE"/>
           </a:p>
@@ -593,7 +593,7 @@
           <a:p>
             <a:fld id="{88C639A2-0E94-4BC3-BD1A-EF9BF8A564DE}" type="datetimeFigureOut">
               <a:rPr lang="de-DE" smtClean="0"/>
-              <a:t>02.04.2026</a:t>
+              <a:t>19.04.2026</a:t>
             </a:fld>
             <a:endParaRPr lang="de-DE"/>
           </a:p>
@@ -763,7 +763,7 @@
           <a:p>
             <a:fld id="{88C639A2-0E94-4BC3-BD1A-EF9BF8A564DE}" type="datetimeFigureOut">
               <a:rPr lang="de-DE" smtClean="0"/>
-              <a:t>02.04.2026</a:t>
+              <a:t>19.04.2026</a:t>
             </a:fld>
             <a:endParaRPr lang="de-DE"/>
           </a:p>
@@ -1009,7 +1009,7 @@
           <a:p>
             <a:fld id="{88C639A2-0E94-4BC3-BD1A-EF9BF8A564DE}" type="datetimeFigureOut">
               <a:rPr lang="de-DE" smtClean="0"/>
-              <a:t>02.04.2026</a:t>
+              <a:t>19.04.2026</a:t>
             </a:fld>
             <a:endParaRPr lang="de-DE"/>
           </a:p>
@@ -1241,7 +1241,7 @@
           <a:p>
             <a:fld id="{88C639A2-0E94-4BC3-BD1A-EF9BF8A564DE}" type="datetimeFigureOut">
               <a:rPr lang="de-DE" smtClean="0"/>
-              <a:t>02.04.2026</a:t>
+              <a:t>19.04.2026</a:t>
             </a:fld>
             <a:endParaRPr lang="de-DE"/>
           </a:p>
@@ -1608,7 +1608,7 @@
           <a:p>
             <a:fld id="{88C639A2-0E94-4BC3-BD1A-EF9BF8A564DE}" type="datetimeFigureOut">
               <a:rPr lang="de-DE" smtClean="0"/>
-              <a:t>02.04.2026</a:t>
+              <a:t>19.04.2026</a:t>
             </a:fld>
             <a:endParaRPr lang="de-DE"/>
           </a:p>
@@ -1726,7 +1726,7 @@
           <a:p>
             <a:fld id="{88C639A2-0E94-4BC3-BD1A-EF9BF8A564DE}" type="datetimeFigureOut">
               <a:rPr lang="de-DE" smtClean="0"/>
-              <a:t>02.04.2026</a:t>
+              <a:t>19.04.2026</a:t>
             </a:fld>
             <a:endParaRPr lang="de-DE"/>
           </a:p>
@@ -1821,7 +1821,7 @@
           <a:p>
             <a:fld id="{88C639A2-0E94-4BC3-BD1A-EF9BF8A564DE}" type="datetimeFigureOut">
               <a:rPr lang="de-DE" smtClean="0"/>
-              <a:t>02.04.2026</a:t>
+              <a:t>19.04.2026</a:t>
             </a:fld>
             <a:endParaRPr lang="de-DE"/>
           </a:p>
@@ -2098,7 +2098,7 @@
           <a:p>
             <a:fld id="{88C639A2-0E94-4BC3-BD1A-EF9BF8A564DE}" type="datetimeFigureOut">
               <a:rPr lang="de-DE" smtClean="0"/>
-              <a:t>02.04.2026</a:t>
+              <a:t>19.04.2026</a:t>
             </a:fld>
             <a:endParaRPr lang="de-DE"/>
           </a:p>
@@ -2355,7 +2355,7 @@
           <a:p>
             <a:fld id="{88C639A2-0E94-4BC3-BD1A-EF9BF8A564DE}" type="datetimeFigureOut">
               <a:rPr lang="de-DE" smtClean="0"/>
-              <a:t>02.04.2026</a:t>
+              <a:t>19.04.2026</a:t>
             </a:fld>
             <a:endParaRPr lang="de-DE"/>
           </a:p>
@@ -2568,7 +2568,7 @@
           <a:p>
             <a:fld id="{88C639A2-0E94-4BC3-BD1A-EF9BF8A564DE}" type="datetimeFigureOut">
               <a:rPr lang="de-DE" smtClean="0"/>
-              <a:t>02.04.2026</a:t>
+              <a:t>19.04.2026</a:t>
             </a:fld>
             <a:endParaRPr lang="de-DE"/>
           </a:p>
@@ -4207,8 +4207,8 @@
           </a:p>
         </p:txBody>
       </p:sp>
-      <mc:AlternateContent xmlns:mc="http://schemas.openxmlformats.org/markup-compatibility/2006" xmlns:a14="http://schemas.microsoft.com/office/drawing/2010/main">
-        <mc:Choice Requires="a14">
+      <mc:AlternateContent xmlns:mc="http://schemas.openxmlformats.org/markup-compatibility/2006">
+        <mc:Choice xmlns:a14="http://schemas.microsoft.com/office/drawing/2010/main" Requires="a14">
           <p:sp>
             <p:nvSpPr>
               <p:cNvPr id="32" name="Textfeld 31">
@@ -4224,7 +4224,7 @@
             <p:spPr>
               <a:xfrm>
                 <a:off x="4327868" y="2111713"/>
-                <a:ext cx="488147" cy="461665"/>
+                <a:ext cx="415563" cy="461665"/>
               </a:xfrm>
               <a:prstGeom prst="rect">
                 <a:avLst/>
@@ -4277,7 +4277,7 @@
                             <a:rPr lang="de-DE" sz="3000" b="0" i="1" smtClean="0">
                               <a:latin typeface="Cambria Math" panose="02040503050406030204" pitchFamily="18" charset="0"/>
                             </a:rPr>
-                            <m:t>𝐸</m:t>
+                            <m:t>𝐼</m:t>
                           </m:r>
                         </m:sub>
                       </m:sSub>
@@ -4289,7 +4289,7 @@
             </p:txBody>
           </p:sp>
         </mc:Choice>
-        <mc:Fallback xmlns="">
+        <mc:Fallback>
           <p:sp>
             <p:nvSpPr>
               <p:cNvPr id="32" name="Textfeld 31">
@@ -4307,7 +4307,7 @@
             <p:spPr>
               <a:xfrm>
                 <a:off x="4327868" y="2111713"/>
-                <a:ext cx="488147" cy="461665"/>
+                <a:ext cx="415563" cy="461665"/>
               </a:xfrm>
               <a:prstGeom prst="rect">
                 <a:avLst/>
@@ -4518,8 +4518,8 @@
           </p:sp>
         </mc:Fallback>
       </mc:AlternateContent>
-      <mc:AlternateContent xmlns:mc="http://schemas.openxmlformats.org/markup-compatibility/2006" xmlns:a14="http://schemas.microsoft.com/office/drawing/2010/main">
-        <mc:Choice Requires="a14">
+      <mc:AlternateContent xmlns:mc="http://schemas.openxmlformats.org/markup-compatibility/2006">
+        <mc:Choice xmlns:a14="http://schemas.microsoft.com/office/drawing/2010/main" Requires="a14">
           <p:sp>
             <p:nvSpPr>
               <p:cNvPr id="35" name="Textfeld 34">
@@ -4535,7 +4535,7 @@
             <p:spPr>
               <a:xfrm>
                 <a:off x="5945739" y="3168303"/>
-                <a:ext cx="1851853" cy="400110"/>
+                <a:ext cx="1789144" cy="400110"/>
               </a:xfrm>
               <a:prstGeom prst="rect">
                 <a:avLst/>
@@ -4588,7 +4588,7 @@
                             <a:rPr lang="de-DE" sz="2600" b="0" i="1" smtClean="0">
                               <a:latin typeface="Cambria Math" panose="02040503050406030204" pitchFamily="18" charset="0"/>
                             </a:rPr>
-                            <m:t>𝐸</m:t>
+                            <m:t>𝐼</m:t>
                           </m:r>
                         </m:sub>
                       </m:sSub>
@@ -4653,7 +4653,7 @@
             </p:txBody>
           </p:sp>
         </mc:Choice>
-        <mc:Fallback xmlns="">
+        <mc:Fallback>
           <p:sp>
             <p:nvSpPr>
               <p:cNvPr id="35" name="Textfeld 34">
@@ -4671,7 +4671,7 @@
             <p:spPr>
               <a:xfrm>
                 <a:off x="5945739" y="3168303"/>
-                <a:ext cx="1851853" cy="400110"/>
+                <a:ext cx="1789144" cy="400110"/>
               </a:xfrm>
               <a:prstGeom prst="rect">
                 <a:avLst/>
@@ -4679,7 +4679,7 @@
               <a:blipFill>
                 <a:blip r:embed="rId4"/>
                 <a:stretch>
-                  <a:fillRect l="-2961" r="-2632" b="-20000"/>
+                  <a:fillRect l="-3061" r="-2721" b="-20000"/>
                 </a:stretch>
               </a:blipFill>
             </p:spPr>
@@ -5031,7 +5031,7 @@
         </p:nvSpPr>
         <p:spPr>
           <a:xfrm>
-            <a:off x="1469659" y="6367284"/>
+            <a:off x="1485701" y="6367284"/>
             <a:ext cx="2236510" cy="400110"/>
           </a:xfrm>
           <a:prstGeom prst="rect">
@@ -5046,18 +5046,13 @@
           <a:lstStyle/>
           <a:p>
             <a:r>
-              <a:rPr lang="de-DE" sz="2000" dirty="0" err="1">
+              <a:rPr lang="de-DE" sz="2000" dirty="0">
                 <a:latin typeface="CMU Bright" panose="02000603000000000000" pitchFamily="2" charset="0"/>
                 <a:ea typeface="CMU Bright" panose="02000603000000000000" pitchFamily="2" charset="0"/>
                 <a:cs typeface="CMU Bright" panose="02000603000000000000" pitchFamily="2" charset="0"/>
               </a:rPr>
-              <a:t>Kontrolllbedingung</a:t>
-            </a:r>
-            <a:endParaRPr lang="de-DE" sz="2000" dirty="0">
-              <a:latin typeface="CMU Bright" panose="02000603000000000000" pitchFamily="2" charset="0"/>
-              <a:ea typeface="CMU Bright" panose="02000603000000000000" pitchFamily="2" charset="0"/>
-              <a:cs typeface="CMU Bright" panose="02000603000000000000" pitchFamily="2" charset="0"/>
-            </a:endParaRPr>
+              <a:t>Kontrollbedingung</a:t>
+            </a:r>
           </a:p>
         </p:txBody>
       </p:sp>
